--- a/黒崎/AI研修一覧/A-109_社内AI利用ガイドライン/スライド.pptx
+++ b/黒崎/AI研修一覧/A-109_社内AI利用ガイドライン/スライド.pptx
@@ -2149,14 +2149,16 @@
           <a:ln/>
         </p:spPr>
         <p:txBody>
-          <a:bodyPr wrap="square" lIns="0" tIns="0" rIns="0" bIns="0" rtlCol="0" anchor="ctr"/>
+          <a:bodyPr wrap="square" lIns="0" tIns="0" rIns="0" bIns="0" rtlCol="0" anchor="ctr">
+            <a:normAutofit/>
+          </a:bodyPr>
           <a:lstStyle/>
           <a:p>
             <a:pPr indent="0" marL="0">
               <a:buNone/>
             </a:pPr>
             <a:r>
-              <a:rPr lang="en-US" sz="3200" b="1" dirty="0">
+              <a:rPr lang="en-US" sz="2200" b="1" dirty="0">
                 <a:solidFill>
                   <a:srgbClr val="111827"/>
                 </a:solidFill>
@@ -2166,7 +2168,7 @@
               </a:rPr>
               <a:t>他社事例② 中小企業の段階的アプローチ</a:t>
             </a:r>
-            <a:endParaRPr lang="en-US" sz="3200" dirty="0"/>
+            <a:endParaRPr lang="en-US" sz="2200" dirty="0"/>
           </a:p>
         </p:txBody>
       </p:sp>
@@ -3117,14 +3119,16 @@
           <a:ln/>
         </p:spPr>
         <p:txBody>
-          <a:bodyPr wrap="square" lIns="0" tIns="0" rIns="0" bIns="0" rtlCol="0" anchor="ctr"/>
+          <a:bodyPr wrap="square" lIns="0" tIns="0" rIns="0" bIns="0" rtlCol="0" anchor="ctr">
+            <a:normAutofit/>
+          </a:bodyPr>
           <a:lstStyle/>
           <a:p>
             <a:pPr indent="0" marL="0">
               <a:buNone/>
             </a:pPr>
             <a:r>
-              <a:rPr lang="en-US" sz="3200" b="1" dirty="0">
+              <a:rPr lang="en-US" sz="2200" b="1" dirty="0">
                 <a:solidFill>
                   <a:srgbClr val="111827"/>
                 </a:solidFill>
@@ -3134,7 +3138,7 @@
               </a:rPr>
               <a:t>自社で始める5つのステップ</a:t>
             </a:r>
-            <a:endParaRPr lang="en-US" sz="3200" dirty="0"/>
+            <a:endParaRPr lang="en-US" sz="2200" dirty="0"/>
           </a:p>
         </p:txBody>
       </p:sp>
@@ -5190,14 +5194,16 @@
           <a:ln/>
         </p:spPr>
         <p:txBody>
-          <a:bodyPr wrap="square" lIns="0" tIns="0" rIns="0" bIns="0" rtlCol="0" anchor="ctr"/>
+          <a:bodyPr wrap="square" lIns="0" tIns="0" rIns="0" bIns="0" rtlCol="0" anchor="ctr">
+            <a:normAutofit/>
+          </a:bodyPr>
           <a:lstStyle/>
           <a:p>
             <a:pPr indent="0" marL="0">
               <a:buNone/>
             </a:pPr>
             <a:r>
-              <a:rPr lang="en-US" sz="3200" b="1" dirty="0">
+              <a:rPr lang="en-US" sz="2200" b="1" dirty="0">
                 <a:solidFill>
                   <a:srgbClr val="111827"/>
                 </a:solidFill>
@@ -5207,7 +5213,7 @@
               </a:rPr>
               <a:t>AIが職場に浸透する今</a:t>
             </a:r>
-            <a:endParaRPr lang="en-US" sz="3200" dirty="0"/>
+            <a:endParaRPr lang="en-US" sz="2200" dirty="0"/>
           </a:p>
         </p:txBody>
       </p:sp>
@@ -6600,14 +6606,16 @@
           <a:ln/>
         </p:spPr>
         <p:txBody>
-          <a:bodyPr wrap="square" lIns="0" tIns="0" rIns="0" bIns="0" rtlCol="0" anchor="ctr"/>
+          <a:bodyPr wrap="square" lIns="0" tIns="0" rIns="0" bIns="0" rtlCol="0" anchor="ctr">
+            <a:normAutofit/>
+          </a:bodyPr>
           <a:lstStyle/>
           <a:p>
             <a:pPr indent="0" marL="0">
               <a:buNone/>
             </a:pPr>
             <a:r>
-              <a:rPr lang="en-US" sz="3200" b="1" dirty="0">
+              <a:rPr lang="en-US" sz="2200" b="1" dirty="0">
                 <a:solidFill>
                   <a:srgbClr val="111827"/>
                 </a:solidFill>
@@ -6617,7 +6625,7 @@
               </a:rPr>
               <a:t>主要項目① 利用範囲の定義</a:t>
             </a:r>
-            <a:endParaRPr lang="en-US" sz="3200" dirty="0"/>
+            <a:endParaRPr lang="en-US" sz="2200" dirty="0"/>
           </a:p>
         </p:txBody>
       </p:sp>
@@ -7366,14 +7374,16 @@
           <a:ln/>
         </p:spPr>
         <p:txBody>
-          <a:bodyPr wrap="square" lIns="0" tIns="0" rIns="0" bIns="0" rtlCol="0" anchor="ctr"/>
+          <a:bodyPr wrap="square" lIns="0" tIns="0" rIns="0" bIns="0" rtlCol="0" anchor="ctr">
+            <a:normAutofit/>
+          </a:bodyPr>
           <a:lstStyle/>
           <a:p>
             <a:pPr indent="0" marL="0">
               <a:buNone/>
             </a:pPr>
             <a:r>
-              <a:rPr lang="en-US" sz="3200" b="1" dirty="0">
+              <a:rPr lang="en-US" sz="2200" b="1" dirty="0">
                 <a:solidFill>
                   <a:srgbClr val="111827"/>
                 </a:solidFill>
@@ -7383,7 +7393,7 @@
               </a:rPr>
               <a:t>主要項目② 禁止事項の明確化</a:t>
             </a:r>
-            <a:endParaRPr lang="en-US" sz="3200" dirty="0"/>
+            <a:endParaRPr lang="en-US" sz="2200" dirty="0"/>
           </a:p>
         </p:txBody>
       </p:sp>
@@ -8108,14 +8118,16 @@
           <a:ln/>
         </p:spPr>
         <p:txBody>
-          <a:bodyPr wrap="square" lIns="0" tIns="0" rIns="0" bIns="0" rtlCol="0" anchor="ctr"/>
+          <a:bodyPr wrap="square" lIns="0" tIns="0" rIns="0" bIns="0" rtlCol="0" anchor="ctr">
+            <a:normAutofit/>
+          </a:bodyPr>
           <a:lstStyle/>
           <a:p>
             <a:pPr indent="0" marL="0">
               <a:buNone/>
             </a:pPr>
             <a:r>
-              <a:rPr lang="en-US" sz="3200" b="1" dirty="0">
+              <a:rPr lang="en-US" sz="2200" b="1" dirty="0">
                 <a:solidFill>
                   <a:srgbClr val="111827"/>
                 </a:solidFill>
@@ -8125,7 +8137,7 @@
               </a:rPr>
               <a:t>主要項目③ データ取扱いルール</a:t>
             </a:r>
-            <a:endParaRPr lang="en-US" sz="3200" dirty="0"/>
+            <a:endParaRPr lang="en-US" sz="2200" dirty="0"/>
           </a:p>
         </p:txBody>
       </p:sp>
@@ -8804,14 +8816,16 @@
           <a:ln/>
         </p:spPr>
         <p:txBody>
-          <a:bodyPr wrap="square" lIns="0" tIns="0" rIns="0" bIns="0" rtlCol="0" anchor="ctr"/>
+          <a:bodyPr wrap="square" lIns="0" tIns="0" rIns="0" bIns="0" rtlCol="0" anchor="ctr">
+            <a:normAutofit/>
+          </a:bodyPr>
           <a:lstStyle/>
           <a:p>
             <a:pPr indent="0" marL="0">
               <a:buNone/>
             </a:pPr>
             <a:r>
-              <a:rPr lang="en-US" sz="3200" b="1" dirty="0">
+              <a:rPr lang="en-US" sz="2200" b="1" dirty="0">
                 <a:solidFill>
                   <a:srgbClr val="111827"/>
                 </a:solidFill>
@@ -8821,7 +8835,7 @@
               </a:rPr>
               <a:t>主要項目④ 承認フロー</a:t>
             </a:r>
-            <a:endParaRPr lang="en-US" sz="3200" dirty="0"/>
+            <a:endParaRPr lang="en-US" sz="2200" dirty="0"/>
           </a:p>
         </p:txBody>
       </p:sp>
@@ -9805,14 +9819,16 @@
           <a:ln/>
         </p:spPr>
         <p:txBody>
-          <a:bodyPr wrap="square" lIns="0" tIns="0" rIns="0" bIns="0" rtlCol="0" anchor="ctr"/>
+          <a:bodyPr wrap="square" lIns="0" tIns="0" rIns="0" bIns="0" rtlCol="0" anchor="ctr">
+            <a:normAutofit/>
+          </a:bodyPr>
           <a:lstStyle/>
           <a:p>
             <a:pPr indent="0" marL="0">
               <a:buNone/>
             </a:pPr>
             <a:r>
-              <a:rPr lang="en-US" sz="3200" b="1" dirty="0">
+              <a:rPr lang="en-US" sz="2200" b="1" dirty="0">
                 <a:solidFill>
                   <a:srgbClr val="111827"/>
                 </a:solidFill>
@@ -9822,7 +9838,7 @@
               </a:rPr>
               <a:t>他社事例① 大手IT企業のアプローチ</a:t>
             </a:r>
-            <a:endParaRPr lang="en-US" sz="3200" dirty="0"/>
+            <a:endParaRPr lang="en-US" sz="2200" dirty="0"/>
           </a:p>
         </p:txBody>
       </p:sp>
